--- a/Topic_C/Exam_Practice/TC-L08_Writing_Workshop_Buildings_Services_Urban_Areas.pptx
+++ b/Topic_C/Exam_Practice/TC-L08_Writing_Workshop_Buildings_Services_Urban_Areas.pptx
@@ -784,7 +784,11 @@
           <a:lstStyle/>
           <a:p>
             <a:r>
-              <a:rPr lang="en-US" dirty="0"/>
+              <a:rPr lang="ar-SA" dirty="0">
+                <a:latin typeface="Amiri" pitchFamily="2" charset="-78"/>
+                <a:ea typeface="Amiri" pitchFamily="2" charset="-78"/>
+                <a:cs typeface="Amiri" pitchFamily="2" charset="-78"/>
+              </a:rPr>
               <a:t>Q3 (3 min to choose and read). Title (أ) suits Core and Develop; title (ب) suits Stretch.</a:t>
             </a:r>
             <a:endParaRPr lang="en-US" dirty="0"/>
@@ -1403,7 +1407,11 @@
           <a:lstStyle/>
           <a:p>
             <a:r>
-              <a:rPr lang="en-US" dirty="0"/>
+              <a:rPr lang="ar-SA" dirty="0">
+                <a:latin typeface="Amiri" pitchFamily="2" charset="-78"/>
+                <a:ea typeface="Amiri" pitchFamily="2" charset="-78"/>
+                <a:cs typeface="Amiri" pitchFamily="2" charset="-78"/>
+              </a:rPr>
               <a:t>WELCOME (1 min) — while students join.
 • Greet each student by name as they arrive: السَّلَامُ عَلَيْكُمْ. Take the register (Pastoral Tracker: attendance 0/1).
 • 2-MINUTE CHECK-IN (SEND training): a private chat to any student who seemed unsettled last lesson — “Are you okay today? 👍 / 👎”.
@@ -1936,7 +1944,11 @@
           <a:lstStyle/>
           <a:p>
             <a:r>
-              <a:rPr lang="en-US" dirty="0"/>
+              <a:rPr lang="ar-SA" dirty="0">
+                <a:latin typeface="Amiri" pitchFamily="2" charset="-78"/>
+                <a:ea typeface="Amiri" pitchFamily="2" charset="-78"/>
+                <a:cs typeface="Amiri" pitchFamily="2" charset="-78"/>
+              </a:rPr>
               <a:t>Question words: أَيْنَ (where) · مَاذَا يُوجَدُ (what is there) · افْتُتِحَ / بُنِيَ (opened / was built — PAST PASSIVE) · سَتَفْعَلَانِ (you two will do — FUTURE).</a:t>
             </a:r>
             <a:endParaRPr lang="en-US" dirty="0"/>
@@ -2508,6 +2520,7 @@
                   <a:srgbClr val="D4AF37"/>
                 </a:solidFill>
                 <a:latin typeface="Amiri" pitchFamily="2" charset="-78"/>
+                <a:ea typeface="Amiri" pitchFamily="2" charset="-78"/>
                 <a:cs typeface="Amiri" pitchFamily="2" charset="-78"/>
               </a:rPr>
               <a:t>م</a:t>
@@ -2714,6 +2727,7 @@
                   <a:srgbClr val="D4AF37"/>
                 </a:solidFill>
                 <a:latin typeface="Amiri" pitchFamily="2" charset="-78"/>
+                <a:ea typeface="Amiri" pitchFamily="2" charset="-78"/>
                 <a:cs typeface="Amiri" pitchFamily="2" charset="-78"/>
               </a:rPr>
               <a:t>وَرْشَةُ الكِتَابَةِ — المَدِينَةُ وَخِدْمَاتُهَا</a:t>
@@ -3171,6 +3185,7 @@
                   <a:srgbClr val="D4AF37"/>
                 </a:solidFill>
                 <a:latin typeface="Amiri" pitchFamily="2" charset="-78"/>
+                <a:ea typeface="Amiri" pitchFamily="2" charset="-78"/>
                 <a:cs typeface="Amiri" pitchFamily="2" charset="-78"/>
               </a:rPr>
               <a:t>م</a:t>
@@ -3491,6 +3506,7 @@
                   <a:srgbClr val="8A6D1E"/>
                 </a:solidFill>
                 <a:latin typeface="Amiri" pitchFamily="2" charset="-78"/>
+                <a:ea typeface="Amiri" pitchFamily="2" charset="-78"/>
                 <a:cs typeface="Amiri" pitchFamily="2" charset="-78"/>
               </a:rPr>
               <a:t>نَمُوذَجُ الإِجَابَةِ</a:t>
@@ -3604,6 +3620,7 @@
                   <a:srgbClr val="1F2A37"/>
                 </a:solidFill>
                 <a:latin typeface="Amiri" pitchFamily="2" charset="-78"/>
+                <a:ea typeface="Amiri" pitchFamily="2" charset="-78"/>
                 <a:cs typeface="Amiri" pitchFamily="2" charset="-78"/>
               </a:rPr>
               <a:t>مَرْحَبًا يَا لَيْلَى،</a:t>
@@ -3623,6 +3640,7 @@
                   <a:srgbClr val="1F2A37"/>
                 </a:solidFill>
                 <a:latin typeface="Amiri" pitchFamily="2" charset="-78"/>
+                <a:ea typeface="Amiri" pitchFamily="2" charset="-78"/>
                 <a:cs typeface="Amiri" pitchFamily="2" charset="-78"/>
               </a:rPr>
               <a:t>كَيْفَ حَالُكِ؟ سَعِيدَةٌ جِدًّا لِأَنَّكِ سَتَزُورِينَنِي فِي مَدِينَتِي! أَسْكُنُ فِي حَيٍّ هَادِئٍ قُرْبَ وَسَطِ المَدِينَةِ. بَيْتِي مُقَابِلَ حَدِيقَةٍ كَبِيرَةٍ، وَبِجَانِبِهِ مَخْبَزٌ وَصَيْدَلِيَّةٌ. فِي مَدِينَتِي يُوجَدُ مَتْحَفٌ مَشْهُورٌ، وَتُوجَدُ أَسْوَاقٌ كَثِيرَةٌ وَمَطَاعِمُ لَذِيذَةٌ. فِي الأُسْبُوعِ المَاضِي فُتِحَ مَرْكَزٌ تِجَارِيٌّ جَدِيدٌ، وَذَهَبْتُ إِلَيْهِ مَعَ أُخْتِي. فِي رَأْيِي، مَدِينَتِي أَجْمَلُ مِنَ العَاصِمَةِ، لِأَنَّهَا أَهْدَأُ وَأَنْظَفُ. عِنْدَمَا تَأْتِينَ، سَنَزُورُ القَلْعَةَ القَدِيمَةَ، وَسَنَرْكَبُ القِطَارَ إِلَى البَحْرِ.</a:t>
@@ -3642,6 +3660,7 @@
                   <a:srgbClr val="1F2A37"/>
                 </a:solidFill>
                 <a:latin typeface="Amiri" pitchFamily="2" charset="-78"/>
+                <a:ea typeface="Amiri" pitchFamily="2" charset="-78"/>
                 <a:cs typeface="Amiri" pitchFamily="2" charset="-78"/>
               </a:rPr>
               <a:t>إِلَى اللِّقَاءِ،</a:t>
@@ -3661,6 +3680,7 @@
                   <a:srgbClr val="1F2A37"/>
                 </a:solidFill>
                 <a:latin typeface="Amiri" pitchFamily="2" charset="-78"/>
+                <a:ea typeface="Amiri" pitchFamily="2" charset="-78"/>
                 <a:cs typeface="Amiri" pitchFamily="2" charset="-78"/>
               </a:rPr>
               <a:t>نُورُ</a:t>
@@ -3824,11 +3844,12 @@
               <a:buNone/>
             </a:pPr>
             <a:r>
-              <a:rPr lang="en-US" sz="950" b="1" dirty="0">
+              <a:rPr lang="ar-SA" sz="950" b="1" dirty="0">
                 <a:solidFill>
                   <a:srgbClr val="FFFFFF"/>
                 </a:solidFill>
                 <a:latin typeface="Calibri" pitchFamily="34" charset="0"/>
+                <a:ea typeface="Amiri" pitchFamily="2" charset="-78"/>
                 <a:cs typeface="Amiri" pitchFamily="2" charset="-78"/>
               </a:rPr>
               <a:t>بَيْتِي مُقَابِلَ</a:t>
@@ -3889,11 +3910,12 @@
               <a:buNone/>
             </a:pPr>
             <a:r>
-              <a:rPr lang="en-US" sz="950" b="1" dirty="0">
+              <a:rPr lang="ar-SA" sz="950" b="1" dirty="0">
                 <a:solidFill>
                   <a:srgbClr val="FFFFFF"/>
                 </a:solidFill>
                 <a:latin typeface="Calibri" pitchFamily="34" charset="0"/>
+                <a:ea typeface="Amiri" pitchFamily="2" charset="-78"/>
                 <a:cs typeface="Amiri" pitchFamily="2" charset="-78"/>
               </a:rPr>
               <a:t>يُوجَدُ مَتْحَفٌ</a:t>
@@ -3954,11 +3976,12 @@
               <a:buNone/>
             </a:pPr>
             <a:r>
-              <a:rPr lang="en-US" sz="950" b="1" dirty="0">
+              <a:rPr lang="ar-SA" sz="950" b="1" dirty="0">
                 <a:solidFill>
                   <a:srgbClr val="FFFFFF"/>
                 </a:solidFill>
                 <a:latin typeface="Calibri" pitchFamily="34" charset="0"/>
+                <a:ea typeface="Amiri" pitchFamily="2" charset="-78"/>
                 <a:cs typeface="Amiri" pitchFamily="2" charset="-78"/>
               </a:rPr>
               <a:t>فُتِحَ مَرْكَزٌ</a:t>
@@ -4019,11 +4042,12 @@
               <a:buNone/>
             </a:pPr>
             <a:r>
-              <a:rPr lang="en-US" sz="950" b="1" dirty="0">
+              <a:rPr lang="ar-SA" sz="950" b="1" dirty="0">
                 <a:solidFill>
                   <a:srgbClr val="FFFFFF"/>
                 </a:solidFill>
                 <a:latin typeface="Calibri" pitchFamily="34" charset="0"/>
+                <a:ea typeface="Amiri" pitchFamily="2" charset="-78"/>
                 <a:cs typeface="Amiri" pitchFamily="2" charset="-78"/>
               </a:rPr>
               <a:t>أَهْدَأُ وَأَنْظَفُ</a:t>
@@ -4157,6 +4181,7 @@
                   <a:srgbClr val="D4AF37"/>
                 </a:solidFill>
                 <a:latin typeface="Amiri" pitchFamily="2" charset="-78"/>
+                <a:ea typeface="Amiri" pitchFamily="2" charset="-78"/>
                 <a:cs typeface="Amiri" pitchFamily="2" charset="-78"/>
               </a:rPr>
               <a:t>م</a:t>
@@ -4477,6 +4502,7 @@
                   <a:srgbClr val="8A6D1E"/>
                 </a:solidFill>
                 <a:latin typeface="Amiri" pitchFamily="2" charset="-78"/>
+                <a:ea typeface="Amiri" pitchFamily="2" charset="-78"/>
                 <a:cs typeface="Amiri" pitchFamily="2" charset="-78"/>
               </a:rPr>
               <a:t>نَمُوذَجُ الإِجَابَةِ</a:t>
@@ -4590,6 +4616,7 @@
                   <a:srgbClr val="1F2A37"/>
                 </a:solidFill>
                 <a:latin typeface="Amiri" pitchFamily="2" charset="-78"/>
+                <a:ea typeface="Amiri" pitchFamily="2" charset="-78"/>
                 <a:cs typeface="Amiri" pitchFamily="2" charset="-78"/>
               </a:rPr>
               <a:t>عَزِيزَتِي لَيْلَى،</a:t>
@@ -4609,6 +4636,7 @@
                   <a:srgbClr val="1F2A37"/>
                 </a:solidFill>
                 <a:latin typeface="Amiri" pitchFamily="2" charset="-78"/>
+                <a:ea typeface="Amiri" pitchFamily="2" charset="-78"/>
                 <a:cs typeface="Amiri" pitchFamily="2" charset="-78"/>
               </a:rPr>
               <a:t>يَا لَهُ مِنْ خَبَرٍ سَعِيدٍ أَنَّكِ سَتَقْضِينَ عُطْلَتَكِ عِنْدَنَا! أَسْكُنُ فِي حَيٍّ سَكَنِيٍّ هَادِئٍ، لَا يَبْعُدُ عَنْ وَسَطِ المَدِينَةِ إِلَّا عَشْرَ دَقَائِقَ بِالحَافِلَةِ؛ فَبَيْتُنَا يَقَعُ مُقَابِلَ حَدِيقَةٍ وَاسِعَةٍ، بَيْنَ المَسْجِدِ وَالمَكْتَبَةِ العَامَّةِ. وَفِي مَدِينَتِنَا مَتْحَفٌ مَبْنِيٌّ مِنَ الحَجَرِ الأَبْيَضِ يَعُودُ إِلَى القَرْنِ التَّاسِعَ عَشَرَ، وَسُوقٌ شَعْبِيٌّ يُقَامُ كُلَّ سَبْتٍ. وَقَدِ افْتُتِحَتْ مُؤَخَّرًا مَكْتَبَةٌ رَقْمِيَّةٌ رَائِعَةٌ قَضَيْتُ فِيهَا يَوْمًا كَامِلًا. صَحِيحٌ أَنَّ مَدِينَتَنَا أَصْغَرُ مِنْ لَنْدَنَ، غَيْرَ أَنَّهَا أَدْفَأُ قَلْبًا. وَعِنْدَمَا تَصِلِينَ، سَأَصْحَبُكِ إِلَى القَلْعَةِ الَّتِي تُطِلُّ عَلَى المَدِينَةِ كُلِّهَا.</a:t>
@@ -4628,6 +4656,7 @@
                   <a:srgbClr val="1F2A37"/>
                 </a:solidFill>
                 <a:latin typeface="Amiri" pitchFamily="2" charset="-78"/>
+                <a:ea typeface="Amiri" pitchFamily="2" charset="-78"/>
                 <a:cs typeface="Amiri" pitchFamily="2" charset="-78"/>
               </a:rPr>
               <a:t>بِشَوْقٍ،</a:t>
@@ -4647,6 +4676,7 @@
                   <a:srgbClr val="1F2A37"/>
                 </a:solidFill>
                 <a:latin typeface="Amiri" pitchFamily="2" charset="-78"/>
+                <a:ea typeface="Amiri" pitchFamily="2" charset="-78"/>
                 <a:cs typeface="Amiri" pitchFamily="2" charset="-78"/>
               </a:rPr>
               <a:t>نُورُ</a:t>
@@ -4810,11 +4840,12 @@
               <a:buNone/>
             </a:pPr>
             <a:r>
-              <a:rPr lang="en-US" sz="950" b="1" dirty="0">
+              <a:rPr lang="ar-SA" sz="950" b="1" dirty="0">
                 <a:solidFill>
                   <a:srgbClr val="FFFFFF"/>
                 </a:solidFill>
                 <a:latin typeface="Calibri" pitchFamily="34" charset="0"/>
+                <a:ea typeface="Amiri" pitchFamily="2" charset="-78"/>
                 <a:cs typeface="Amiri" pitchFamily="2" charset="-78"/>
               </a:rPr>
               <a:t>لَا يَبْعُدُ … إِلَّا</a:t>
@@ -4875,11 +4906,12 @@
               <a:buNone/>
             </a:pPr>
             <a:r>
-              <a:rPr lang="en-US" sz="950" b="1" dirty="0">
+              <a:rPr lang="ar-SA" sz="950" b="1" dirty="0">
                 <a:solidFill>
                   <a:srgbClr val="FFFFFF"/>
                 </a:solidFill>
                 <a:latin typeface="Calibri" pitchFamily="34" charset="0"/>
+                <a:ea typeface="Amiri" pitchFamily="2" charset="-78"/>
                 <a:cs typeface="Amiri" pitchFamily="2" charset="-78"/>
               </a:rPr>
               <a:t>بَيْنَ المَسْجِدِ وَالمَكْتَبَةِ</a:t>
@@ -4940,11 +4972,12 @@
               <a:buNone/>
             </a:pPr>
             <a:r>
-              <a:rPr lang="en-US" sz="950" b="1" dirty="0">
+              <a:rPr lang="ar-SA" sz="950" b="1" dirty="0">
                 <a:solidFill>
                   <a:srgbClr val="FFFFFF"/>
                 </a:solidFill>
                 <a:latin typeface="Calibri" pitchFamily="34" charset="0"/>
+                <a:ea typeface="Amiri" pitchFamily="2" charset="-78"/>
                 <a:cs typeface="Amiri" pitchFamily="2" charset="-78"/>
               </a:rPr>
               <a:t>مَبْنِيٌّ مِنَ الحَجَرِ</a:t>
@@ -5005,11 +5038,12 @@
               <a:buNone/>
             </a:pPr>
             <a:r>
-              <a:rPr lang="en-US" sz="950" b="1" dirty="0">
+              <a:rPr lang="ar-SA" sz="950" b="1" dirty="0">
                 <a:solidFill>
                   <a:srgbClr val="FFFFFF"/>
                 </a:solidFill>
                 <a:latin typeface="Calibri" pitchFamily="34" charset="0"/>
+                <a:ea typeface="Amiri" pitchFamily="2" charset="-78"/>
                 <a:cs typeface="Amiri" pitchFamily="2" charset="-78"/>
               </a:rPr>
               <a:t>قَدِ افْتُتِحَتْ</a:t>
@@ -5143,6 +5177,7 @@
                   <a:srgbClr val="D4AF37"/>
                 </a:solidFill>
                 <a:latin typeface="Amiri" pitchFamily="2" charset="-78"/>
+                <a:ea typeface="Amiri" pitchFamily="2" charset="-78"/>
                 <a:cs typeface="Amiri" pitchFamily="2" charset="-78"/>
               </a:rPr>
               <a:t>م</a:t>
@@ -5463,6 +5498,7 @@
                   <a:srgbClr val="8A6D1E"/>
                 </a:solidFill>
                 <a:latin typeface="Amiri" pitchFamily="2" charset="-78"/>
+                <a:ea typeface="Amiri" pitchFamily="2" charset="-78"/>
                 <a:cs typeface="Amiri" pitchFamily="2" charset="-78"/>
               </a:rPr>
               <a:t>اخْتَرْ عُنْوَانًا وَاحِدًا</a:t>
@@ -5743,6 +5779,7 @@
                   <a:srgbClr val="1B3B6F"/>
                 </a:solidFill>
                 <a:latin typeface="Amiri" pitchFamily="2" charset="-78"/>
+                <a:ea typeface="Amiri" pitchFamily="2" charset="-78"/>
                 <a:cs typeface="Amiri" pitchFamily="2" charset="-78"/>
               </a:rPr>
               <a:t>مَدِينَتِي وَحَيِّي</a:t>
@@ -5781,6 +5818,7 @@
                   <a:srgbClr val="1B3B6F"/>
                 </a:solidFill>
                 <a:latin typeface="Amiri" pitchFamily="2" charset="-78"/>
+                <a:ea typeface="Amiri" pitchFamily="2" charset="-78"/>
                 <a:cs typeface="Amiri" pitchFamily="2" charset="-78"/>
               </a:rPr>
               <a:t>(أ)</a:t>
@@ -5887,6 +5925,7 @@
                   <a:srgbClr val="1B3B6F"/>
                 </a:solidFill>
                 <a:latin typeface="Amiri" pitchFamily="2" charset="-78"/>
+                <a:ea typeface="Amiri" pitchFamily="2" charset="-78"/>
                 <a:cs typeface="Amiri" pitchFamily="2" charset="-78"/>
               </a:rPr>
               <a:t>وَصْفُ مَدِينَتِكَ · حَيُّكَ وَخِدْمَاتُهُ · مُقَارَنَةٌ بِمَكَانٍ زُرْتَهُ · رَأْيُكَ وَأَيْنَ سَتَسْكُنُ فِي المُسْتَقْبَلِ</a:t>
@@ -6018,6 +6057,7 @@
                   <a:srgbClr val="1B3B6F"/>
                 </a:solidFill>
                 <a:latin typeface="Amiri" pitchFamily="2" charset="-78"/>
+                <a:ea typeface="Amiri" pitchFamily="2" charset="-78"/>
                 <a:cs typeface="Amiri" pitchFamily="2" charset="-78"/>
               </a:rPr>
               <a:t>مُدُنُ المُسْتَقْبَلِ</a:t>
@@ -6056,6 +6096,7 @@
                   <a:srgbClr val="1B3B6F"/>
                 </a:solidFill>
                 <a:latin typeface="Amiri" pitchFamily="2" charset="-78"/>
+                <a:ea typeface="Amiri" pitchFamily="2" charset="-78"/>
                 <a:cs typeface="Amiri" pitchFamily="2" charset="-78"/>
               </a:rPr>
               <a:t>(ب)</a:t>
@@ -6159,6 +6200,7 @@
                   <a:srgbClr val="1B3B6F"/>
                 </a:solidFill>
                 <a:latin typeface="Amiri" pitchFamily="2" charset="-78"/>
+                <a:ea typeface="Amiri" pitchFamily="2" charset="-78"/>
                 <a:cs typeface="Amiri" pitchFamily="2" charset="-78"/>
               </a:rPr>
               <a:t>نُمُوُّ المُدُنِ · المَاضِي وَالحَاضِرُ · مِثَالٌ رَأَيْتَهُ · رَأْيُكَ وَاقْتِرَاحُكَ</a:t>
@@ -6358,6 +6400,7 @@
                   <a:srgbClr val="D4AF37"/>
                 </a:solidFill>
                 <a:latin typeface="Amiri" pitchFamily="2" charset="-78"/>
+                <a:ea typeface="Amiri" pitchFamily="2" charset="-78"/>
                 <a:cs typeface="Amiri" pitchFamily="2" charset="-78"/>
               </a:rPr>
               <a:t>م</a:t>
@@ -6678,6 +6721,7 @@
                   <a:srgbClr val="8A6D1E"/>
                 </a:solidFill>
                 <a:latin typeface="Amiri" pitchFamily="2" charset="-78"/>
+                <a:ea typeface="Amiri" pitchFamily="2" charset="-78"/>
                 <a:cs typeface="Amiri" pitchFamily="2" charset="-78"/>
               </a:rPr>
               <a:t>خُطَّةُ الكِتَابَةِ</a:t>
@@ -7302,6 +7346,7 @@
                   <a:srgbClr val="1B3B6F"/>
                 </a:solidFill>
                 <a:latin typeface="Amiri" pitchFamily="2" charset="-78"/>
+                <a:ea typeface="Amiri" pitchFamily="2" charset="-78"/>
                 <a:cs typeface="Amiri" pitchFamily="2" charset="-78"/>
               </a:rPr>
               <a:t>مُقَابِلَ بَيْتِي تُوجَدُ حَدِيقَةٌ، وَبِجَانِبِهِ مَسْجِدٌ.</a:t>
@@ -7401,6 +7446,7 @@
                   <a:srgbClr val="1B3B6F"/>
                 </a:solidFill>
                 <a:latin typeface="Amiri" pitchFamily="2" charset="-78"/>
+                <a:ea typeface="Amiri" pitchFamily="2" charset="-78"/>
                 <a:cs typeface="Amiri" pitchFamily="2" charset="-78"/>
               </a:rPr>
               <a:t>كَانَتِ البُيُوتُ مَبْنِيَّةً مِنَ الطِّينِ وَالحَجَرِ.</a:t>
@@ -7500,6 +7546,7 @@
                   <a:srgbClr val="1B3B6F"/>
                 </a:solidFill>
                 <a:latin typeface="Amiri" pitchFamily="2" charset="-78"/>
+                <a:ea typeface="Amiri" pitchFamily="2" charset="-78"/>
                 <a:cs typeface="Amiri" pitchFamily="2" charset="-78"/>
               </a:rPr>
               <a:t>سَأَسْكُنُ فِي مَدِينَةٍ صَغِيرَةٍ قُرْبَ البَحْرِ.</a:t>
@@ -7661,6 +7708,7 @@
                   <a:srgbClr val="1F2A37"/>
                 </a:solidFill>
                 <a:latin typeface="Amiri" pitchFamily="2" charset="-78"/>
+                <a:ea typeface="Amiri" pitchFamily="2" charset="-78"/>
                 <a:cs typeface="Amiri" pitchFamily="2" charset="-78"/>
               </a:rPr>
               <a:t>أ</a:t>
@@ -7687,6 +7735,7 @@
                   <a:srgbClr val="1F2A37"/>
                 </a:solidFill>
                 <a:latin typeface="Amiri" pitchFamily="2" charset="-78"/>
+                <a:ea typeface="Amiri" pitchFamily="2" charset="-78"/>
                 <a:cs typeface="Amiri" pitchFamily="2" charset="-78"/>
               </a:rPr>
               <a:t>ب</a:t>
@@ -7833,6 +7882,7 @@
                   <a:srgbClr val="D4AF37"/>
                 </a:solidFill>
                 <a:latin typeface="Amiri" pitchFamily="2" charset="-78"/>
+                <a:ea typeface="Amiri" pitchFamily="2" charset="-78"/>
                 <a:cs typeface="Amiri" pitchFamily="2" charset="-78"/>
               </a:rPr>
               <a:t>م</a:t>
@@ -8090,6 +8140,7 @@
                   <a:srgbClr val="8A6D1E"/>
                 </a:solidFill>
                 <a:latin typeface="Amiri" pitchFamily="2" charset="-78"/>
+                <a:ea typeface="Amiri" pitchFamily="2" charset="-78"/>
                 <a:cs typeface="Amiri" pitchFamily="2" charset="-78"/>
               </a:rPr>
               <a:t>أ</a:t>
@@ -8154,6 +8205,7 @@
                   <a:srgbClr val="1B3B6F"/>
                 </a:solidFill>
                 <a:latin typeface="Amiri" pitchFamily="2" charset="-78"/>
+                <a:ea typeface="Amiri" pitchFamily="2" charset="-78"/>
                 <a:cs typeface="Amiri" pitchFamily="2" charset="-78"/>
               </a:rPr>
               <a:t>أ</a:t>
@@ -8205,6 +8257,7 @@
                   <a:srgbClr val="8A6D1E"/>
                 </a:solidFill>
                 <a:latin typeface="Amiri" pitchFamily="2" charset="-78"/>
+                <a:ea typeface="Amiri" pitchFamily="2" charset="-78"/>
                 <a:cs typeface="Amiri" pitchFamily="2" charset="-78"/>
               </a:rPr>
               <a:t>نَمُوذَجُ الإِجَابَةِ</a:t>
@@ -8318,6 +8371,7 @@
                   <a:srgbClr val="1F2A37"/>
                 </a:solidFill>
                 <a:latin typeface="Amiri" pitchFamily="2" charset="-78"/>
+                <a:ea typeface="Amiri" pitchFamily="2" charset="-78"/>
                 <a:cs typeface="Amiri" pitchFamily="2" charset="-78"/>
               </a:rPr>
               <a:t>أَسْكُنُ فِي مَدِينَةِ بِرْمِنْغْهَامَ. هِيَ مَدِينَةٌ كَبِيرَةٌ وَمُزْدَحِمَةٌ فِي وَسَطِ بَرِيطَانْيَا. فِيهَا تُوجَدُ مَبَانٍ عَالِيَةٌ كَثِيرَةٌ، وَيُوجَدُ مَرْكَزٌ تِجَارِيٌّ كَبِيرٌ جِدًّا، وَمَحَطَّةُ قِطَارٍ حَدِيثَةٌ. المُوَاصَلَاتُ فِيهَا سَرِيعَةٌ، لٰكِنَّ الشَّوَارِعَ مُزْدَحِمَةٌ فِي الصَّبَاحِ.</a:t>
@@ -8337,6 +8391,7 @@
                   <a:srgbClr val="1F2A37"/>
                 </a:solidFill>
                 <a:latin typeface="Amiri" pitchFamily="2" charset="-78"/>
+                <a:ea typeface="Amiri" pitchFamily="2" charset="-78"/>
                 <a:cs typeface="Amiri" pitchFamily="2" charset="-78"/>
               </a:rPr>
               <a:t>بَيْتِي فِي حَيٍّ هَادِئٍ. مُقَابِلَ بَيْتِي تُوجَدُ حَدِيقَةٌ جَمِيلَةٌ، وَبِجَانِبِهِ مَسْجِدٌ صَغِيرٌ. مَدْرَسَتِي قَرِيبَةٌ، بَيْنَ المَكْتَبَةِ العَامَّةِ وَالمُسْتَشْفَى. أُحِبُّ حَيِّي، لِأَنَّ الجِيرَانَ لُطَفَاءُ، وَالخِدْمَاتِ جَيِّدَةٌ.</a:t>
@@ -8356,6 +8411,7 @@
                   <a:srgbClr val="1F2A37"/>
                 </a:solidFill>
                 <a:latin typeface="Amiri" pitchFamily="2" charset="-78"/>
+                <a:ea typeface="Amiri" pitchFamily="2" charset="-78"/>
                 <a:cs typeface="Amiri" pitchFamily="2" charset="-78"/>
               </a:rPr>
               <a:t>فِي الشِّتَاءِ المَاضِي زُرْتُ قَرْيَةَ جَدِّي فِي بَاكِسْتَانَ. كَانَتِ القَرْيَةُ صَغِيرَةً وَهَادِئَةً جِدًّا. كَانَتِ البُيُوتُ مَبْنِيَّةً مِنَ الطِّينِ وَالحَجَرِ، وَلَمْ تَكُنْ هُنَاكَ مَحَلَّاتٌ كَبِيرَةٌ. لَعِبْتُ مَعَ أَبْنَاءِ عَمِّي فِي الحُقُولِ كُلَّ يَوْمٍ، وَكُنَّا نَشْرَبُ الحَلِيبَ الطَّازَجَ.</a:t>
@@ -8375,6 +8431,7 @@
                   <a:srgbClr val="1F2A37"/>
                 </a:solidFill>
                 <a:latin typeface="Amiri" pitchFamily="2" charset="-78"/>
+                <a:ea typeface="Amiri" pitchFamily="2" charset="-78"/>
                 <a:cs typeface="Amiri" pitchFamily="2" charset="-78"/>
               </a:rPr>
               <a:t>فِي رَأْيِي، المَدِينَةُ أَفْضَلُ لِلدِّرَاسَةِ وَالعَمَلِ، لٰكِنَّ القَرْيَةَ أَهْدَأُ وَأَنْظَفُ. فِي المُسْتَقْبَلِ سَأَسْكُنُ فِي مَدِينَةٍ صَغِيرَةٍ قُرْبَ البَحْرِ، لِأَنِّي أُرِيدُ الهُدُوءَ وَالخِدْمَاتِ مَعًا.</a:t>
@@ -8538,11 +8595,12 @@
               <a:buNone/>
             </a:pPr>
             <a:r>
-              <a:rPr lang="en-US" sz="950" b="1" dirty="0">
+              <a:rPr lang="ar-SA" sz="950" b="1" dirty="0">
                 <a:solidFill>
                   <a:srgbClr val="FFFFFF"/>
                 </a:solidFill>
                 <a:latin typeface="Calibri" pitchFamily="34" charset="0"/>
+                <a:ea typeface="Amiri" pitchFamily="2" charset="-78"/>
                 <a:cs typeface="Amiri" pitchFamily="2" charset="-78"/>
               </a:rPr>
               <a:t>تُوجَدُ مَبَانٍ عَالِيَةٌ</a:t>
@@ -8603,11 +8661,12 @@
               <a:buNone/>
             </a:pPr>
             <a:r>
-              <a:rPr lang="en-US" sz="950" b="1" dirty="0">
+              <a:rPr lang="ar-SA" sz="950" b="1" dirty="0">
                 <a:solidFill>
                   <a:srgbClr val="FFFFFF"/>
                 </a:solidFill>
                 <a:latin typeface="Calibri" pitchFamily="34" charset="0"/>
+                <a:ea typeface="Amiri" pitchFamily="2" charset="-78"/>
                 <a:cs typeface="Amiri" pitchFamily="2" charset="-78"/>
               </a:rPr>
               <a:t>مُقَابِلَ بَيْتِي</a:t>
@@ -8668,11 +8727,12 @@
               <a:buNone/>
             </a:pPr>
             <a:r>
-              <a:rPr lang="en-US" sz="950" b="1" dirty="0">
+              <a:rPr lang="ar-SA" sz="950" b="1" dirty="0">
                 <a:solidFill>
                   <a:srgbClr val="FFFFFF"/>
                 </a:solidFill>
                 <a:latin typeface="Calibri" pitchFamily="34" charset="0"/>
+                <a:ea typeface="Amiri" pitchFamily="2" charset="-78"/>
                 <a:cs typeface="Amiri" pitchFamily="2" charset="-78"/>
               </a:rPr>
               <a:t>كَانَتِ البُيُوتُ مَبْنِيَّةً</a:t>
@@ -8733,11 +8793,12 @@
               <a:buNone/>
             </a:pPr>
             <a:r>
-              <a:rPr lang="en-US" sz="950" b="1" dirty="0">
+              <a:rPr lang="ar-SA" sz="950" b="1" dirty="0">
                 <a:solidFill>
                   <a:srgbClr val="FFFFFF"/>
                 </a:solidFill>
                 <a:latin typeface="Calibri" pitchFamily="34" charset="0"/>
+                <a:ea typeface="Amiri" pitchFamily="2" charset="-78"/>
                 <a:cs typeface="Amiri" pitchFamily="2" charset="-78"/>
               </a:rPr>
               <a:t>أَهْدَأُ وَأَنْظَفُ</a:t>
@@ -8871,6 +8932,7 @@
                   <a:srgbClr val="D4AF37"/>
                 </a:solidFill>
                 <a:latin typeface="Amiri" pitchFamily="2" charset="-78"/>
+                <a:ea typeface="Amiri" pitchFamily="2" charset="-78"/>
                 <a:cs typeface="Amiri" pitchFamily="2" charset="-78"/>
               </a:rPr>
               <a:t>م</a:t>
@@ -9128,6 +9190,7 @@
                   <a:srgbClr val="8A6D1E"/>
                 </a:solidFill>
                 <a:latin typeface="Amiri" pitchFamily="2" charset="-78"/>
+                <a:ea typeface="Amiri" pitchFamily="2" charset="-78"/>
                 <a:cs typeface="Amiri" pitchFamily="2" charset="-78"/>
               </a:rPr>
               <a:t>أ</a:t>
@@ -9192,6 +9255,7 @@
                   <a:srgbClr val="1B3B6F"/>
                 </a:solidFill>
                 <a:latin typeface="Amiri" pitchFamily="2" charset="-78"/>
+                <a:ea typeface="Amiri" pitchFamily="2" charset="-78"/>
                 <a:cs typeface="Amiri" pitchFamily="2" charset="-78"/>
               </a:rPr>
               <a:t>أ</a:t>
@@ -9243,6 +9307,7 @@
                   <a:srgbClr val="8A6D1E"/>
                 </a:solidFill>
                 <a:latin typeface="Amiri" pitchFamily="2" charset="-78"/>
+                <a:ea typeface="Amiri" pitchFamily="2" charset="-78"/>
                 <a:cs typeface="Amiri" pitchFamily="2" charset="-78"/>
               </a:rPr>
               <a:t>نَمُوذَجُ الإِجَابَةِ</a:t>
@@ -9356,6 +9421,7 @@
                   <a:srgbClr val="1F2A37"/>
                 </a:solidFill>
                 <a:latin typeface="Amiri" pitchFamily="2" charset="-78"/>
+                <a:ea typeface="Amiri" pitchFamily="2" charset="-78"/>
                 <a:cs typeface="Amiri" pitchFamily="2" charset="-78"/>
               </a:rPr>
               <a:t>لِكُلِّ مَدِينَةٍ شَخْصِيَّةٌ، وَشَخْصِيَّةُ مَدِينَتِي بِرْمِنْغْهَامَ مَزِيجٌ مِنَ القَدِيمِ وَالحَدِيثِ؛ فَبِجَانِبِ المَصَانِعِ القَدِيمَةِ المَبْنِيَّةِ مِنَ الطُّوبِ الأَحْمَرِ، تَرْتَفِعُ أَبْرَاجٌ زُجَاجِيَّةٌ، وَمَكْتَبَةٌ عَامَّةٌ تُعَدُّ مِنْ أَكْبَرِ المَكْتَبَاتِ فِي أُورُوبَّا.</a:t>
@@ -9375,6 +9441,7 @@
                   <a:srgbClr val="1F2A37"/>
                 </a:solidFill>
                 <a:latin typeface="Amiri" pitchFamily="2" charset="-78"/>
+                <a:ea typeface="Amiri" pitchFamily="2" charset="-78"/>
                 <a:cs typeface="Amiri" pitchFamily="2" charset="-78"/>
               </a:rPr>
               <a:t>أَمَّا حَيِّي، فَهُوَ عَالَمٌ صَغِيرٌ مُتَكَامِلٌ؛ إِذْ يُوجَدُ فِيهِ كُلُّ مَا أَحْتَاجُ إِلَيْهِ: مَدْرَسَةٌ وَمَسْجِدٌ وَمَرْكَزٌ صِحِّيٌّ، وَسُوقٌ يَمْتَلِئُ بِالفَوَاكِهِ وَالتَّوَابِلِ مِنْ كُلِّ أَنْحَاءِ العَالَمِ. غَيْرَ أَنَّهُ يَنْقُصُهُ مَكَانٌ لِلشَّبَابِ يَجْتَمِعُونَ فِيهِ بَعْدَ المَدْرَسَةِ، مِمَّا يَدْفَعُ كَثِيرًا مِنْهُمْ إِلَى قَضَاءِ المَسَاءِ فِي الشَّوَارِعِ أَوْ أَمَامَ الشَّاشَاتِ.</a:t>
@@ -9394,6 +9461,7 @@
                   <a:srgbClr val="1F2A37"/>
                 </a:solidFill>
                 <a:latin typeface="Amiri" pitchFamily="2" charset="-78"/>
+                <a:ea typeface="Amiri" pitchFamily="2" charset="-78"/>
                 <a:cs typeface="Amiri" pitchFamily="2" charset="-78"/>
               </a:rPr>
               <a:t>وَقَدْ شَعَرْتُ بِالفَرْقِ بَيْنَ المَدِينَةِ وَالقَرْيَةِ حِينَ قَضَيْتُ شَهْرًا فِي قَرْيَةِ جَدِّي؛ فَهُنَاكَ لَا تُوجَدُ مُوَاصَلَاتٌ عَامَّةٌ، وَأَقْرَبُ مُسْتَشْفًى يَبْعُدُ سَاعَةً بِالسَّيَّارَةِ، لٰكِنَّ الجِيرَانَ كَانُوا يَتَقَاسَمُونَ الطَّعَامَ وَالأَخْبَارَ كُلَّ مَسَاءٍ.</a:t>
@@ -9413,6 +9481,7 @@
                   <a:srgbClr val="1F2A37"/>
                 </a:solidFill>
                 <a:latin typeface="Amiri" pitchFamily="2" charset="-78"/>
+                <a:ea typeface="Amiri" pitchFamily="2" charset="-78"/>
                 <a:cs typeface="Amiri" pitchFamily="2" charset="-78"/>
               </a:rPr>
               <a:t>صَحِيحٌ أَنَّ المَدِينَةَ تُوَفِّرُ الخِدْمَاتِ وَالفُرَصَ، غَيْرَ أَنَّهَا قَدْ تُفْقِدُنَا الدِّفْءَ الإِنْسَانِيَّ. وَلَوْ صُمِّمَتْ أَحْيَاءُ المُدُنِ بِحَيْثُ يَلْتَقِي سُكَّانُهَا فِي حَدَائِقَ وَمَرَاكِزَ مُشْتَرَكَةٍ، لَجَمَعْنَا بَيْنَ مَزَايَا المَكَانَيْنِ.</a:t>
@@ -9511,11 +9580,12 @@
               <a:buNone/>
             </a:pPr>
             <a:r>
-              <a:rPr lang="en-US" sz="950" b="1" dirty="0">
+              <a:rPr lang="ar-SA" sz="950" b="1" dirty="0">
                 <a:solidFill>
                   <a:srgbClr val="FFFFFF"/>
                 </a:solidFill>
                 <a:latin typeface="Calibri" pitchFamily="34" charset="0"/>
+                <a:ea typeface="Amiri" pitchFamily="2" charset="-78"/>
                 <a:cs typeface="Amiri" pitchFamily="2" charset="-78"/>
               </a:rPr>
               <a:t>المَبْنِيَّةِ مِنَ الطُّوبِ</a:t>
@@ -9576,11 +9646,12 @@
               <a:buNone/>
             </a:pPr>
             <a:r>
-              <a:rPr lang="en-US" sz="950" b="1" dirty="0">
+              <a:rPr lang="ar-SA" sz="950" b="1" dirty="0">
                 <a:solidFill>
                   <a:srgbClr val="FFFFFF"/>
                 </a:solidFill>
                 <a:latin typeface="Calibri" pitchFamily="34" charset="0"/>
+                <a:ea typeface="Amiri" pitchFamily="2" charset="-78"/>
                 <a:cs typeface="Amiri" pitchFamily="2" charset="-78"/>
               </a:rPr>
               <a:t>تُعَدُّ مِنْ أَكْبَرِ</a:t>
@@ -9641,11 +9712,12 @@
               <a:buNone/>
             </a:pPr>
             <a:r>
-              <a:rPr lang="en-US" sz="950" b="1" dirty="0">
+              <a:rPr lang="ar-SA" sz="950" b="1" dirty="0">
                 <a:solidFill>
                   <a:srgbClr val="FFFFFF"/>
                 </a:solidFill>
                 <a:latin typeface="Calibri" pitchFamily="34" charset="0"/>
+                <a:ea typeface="Amiri" pitchFamily="2" charset="-78"/>
                 <a:cs typeface="Amiri" pitchFamily="2" charset="-78"/>
               </a:rPr>
               <a:t>يَنْقُصُهُ مَكَانٌ</a:t>
@@ -9706,11 +9778,12 @@
               <a:buNone/>
             </a:pPr>
             <a:r>
-              <a:rPr lang="en-US" sz="950" b="1" dirty="0">
+              <a:rPr lang="ar-SA" sz="950" b="1" dirty="0">
                 <a:solidFill>
                   <a:srgbClr val="FFFFFF"/>
                 </a:solidFill>
                 <a:latin typeface="Calibri" pitchFamily="34" charset="0"/>
+                <a:ea typeface="Amiri" pitchFamily="2" charset="-78"/>
                 <a:cs typeface="Amiri" pitchFamily="2" charset="-78"/>
               </a:rPr>
               <a:t>لَوْ صُمِّمَتْ … لَجَمَعْنَا</a:t>
@@ -9844,6 +9917,7 @@
                   <a:srgbClr val="D4AF37"/>
                 </a:solidFill>
                 <a:latin typeface="Amiri" pitchFamily="2" charset="-78"/>
+                <a:ea typeface="Amiri" pitchFamily="2" charset="-78"/>
                 <a:cs typeface="Amiri" pitchFamily="2" charset="-78"/>
               </a:rPr>
               <a:t>م</a:t>
@@ -10101,6 +10175,7 @@
                   <a:srgbClr val="8A6D1E"/>
                 </a:solidFill>
                 <a:latin typeface="Amiri" pitchFamily="2" charset="-78"/>
+                <a:ea typeface="Amiri" pitchFamily="2" charset="-78"/>
                 <a:cs typeface="Amiri" pitchFamily="2" charset="-78"/>
               </a:rPr>
               <a:t>ب</a:t>
@@ -10165,6 +10240,7 @@
                   <a:srgbClr val="1B3B6F"/>
                 </a:solidFill>
                 <a:latin typeface="Amiri" pitchFamily="2" charset="-78"/>
+                <a:ea typeface="Amiri" pitchFamily="2" charset="-78"/>
                 <a:cs typeface="Amiri" pitchFamily="2" charset="-78"/>
               </a:rPr>
               <a:t>ب</a:t>
@@ -10216,6 +10292,7 @@
                   <a:srgbClr val="8A6D1E"/>
                 </a:solidFill>
                 <a:latin typeface="Amiri" pitchFamily="2" charset="-78"/>
+                <a:ea typeface="Amiri" pitchFamily="2" charset="-78"/>
                 <a:cs typeface="Amiri" pitchFamily="2" charset="-78"/>
               </a:rPr>
               <a:t>نَمُوذَجُ الإِجَابَةِ</a:t>
@@ -10329,6 +10406,7 @@
                   <a:srgbClr val="1F2A37"/>
                 </a:solidFill>
                 <a:latin typeface="Amiri" pitchFamily="2" charset="-78"/>
+                <a:ea typeface="Amiri" pitchFamily="2" charset="-78"/>
                 <a:cs typeface="Amiri" pitchFamily="2" charset="-78"/>
               </a:rPr>
               <a:t>يَعِيشُ اليَوْمَ أَكْثَرُ مِنْ نِصْفِ سُكَّانِ العَالَمِ فِي المُدُنِ، وَيُتَوَقَّعُ أَنْ تَرْتَفِعَ هٰذِهِ النِّسْبَةُ إِلَى الثُّلُثَيْنِ خِلَالَ ثَلَاثِينَ سَنَةً. فَكَيْفَ يَجِبُ أَنْ تَكُونَ مُدُنُ المُسْتَقْبَلِ لِكَيْ تَتَّسِعَ لِهٰذِهِ المَلَايِينِ؟</a:t>
@@ -10348,6 +10426,7 @@
                   <a:srgbClr val="1F2A37"/>
                 </a:solidFill>
                 <a:latin typeface="Amiri" pitchFamily="2" charset="-78"/>
+                <a:ea typeface="Amiri" pitchFamily="2" charset="-78"/>
                 <a:cs typeface="Amiri" pitchFamily="2" charset="-78"/>
               </a:rPr>
               <a:t>فِي المَاضِي كَانَتِ المُدُنُ تَنْمُو دُونَ تَخْطِيطٍ، فَتُبْنَى الأَحْيَاءُ المُزْدَحِمَةُ حَوْلَ المَصَانِعِ وَالطُّرُقِ السَّرِيعَةِ، أَمَّا اليَوْمَ فَيُدْرِكُ المُخَطِّطُونَ أَنَّ المَسَاحَاتِ الخَضْرَاءَ وَالمُوَاصَلَاتِ العَامَّةَ لَيْسَتْ رَفَاهِيَةً، بَلْ ضَرُورَةً لِصِحَّةِ السُّكَّانِ.</a:t>
@@ -10367,6 +10446,7 @@
                   <a:srgbClr val="1F2A37"/>
                 </a:solidFill>
                 <a:latin typeface="Amiri" pitchFamily="2" charset="-78"/>
+                <a:ea typeface="Amiri" pitchFamily="2" charset="-78"/>
                 <a:cs typeface="Amiri" pitchFamily="2" charset="-78"/>
               </a:rPr>
               <a:t>وَقَدْ رَأَيْتُ نَمُوذَجًا مُدْهِشًا عِنْدَمَا زُرْتُ سِنْغَافُورَةَ مَعَ أُسْرَتِي؛ فَالمَبَانِي هُنَاكَ مُغَطَّاةٌ بِالنَّبَاتَاتِ، وَالحَدَائِقُ مُعَلَّقَةٌ بَيْنَ الأَبْرَاجِ، وَالقِطَارَاتُ تَصِلُ إِلَى كُلِّ حَيٍّ فِي دَقَائِقَ، مِمَّا يَجْعَلُ السَّيَّارَةَ غَيْرَ ضَرُورِيَّةٍ تَقْرِيبًا. وَأَدْهَشَنِي أَنَّ دَرَجَةَ الحَرَارَةِ فِي الشَّوَارِعِ المُشَجَّرَةِ كَانَتْ أَقَلَّ بِوُضُوحٍ مِنْ غَيْرِهَا.</a:t>
@@ -10386,6 +10466,7 @@
                   <a:srgbClr val="1F2A37"/>
                 </a:solidFill>
                 <a:latin typeface="Amiri" pitchFamily="2" charset="-78"/>
+                <a:ea typeface="Amiri" pitchFamily="2" charset="-78"/>
                 <a:cs typeface="Amiri" pitchFamily="2" charset="-78"/>
               </a:rPr>
               <a:t>صَحِيحٌ أَنَّ بِنَاءَ مُدُنٍ كَهٰذِهِ مُكْلِفٌ، غَيْرَ أَنَّ تَكْلِفَةَ التَّلَوُّثِ وَالزَّحْمَةِ أَعْلَى بِكَثِيرٍ. وَإِذَا اسْتَثْمَرَتِ الحُكُومَاتُ فِي مَبَانٍ صَدِيقَةٍ لِلْبِيئَةِ وَمُوَاصَلَاتٍ نَظِيفَةٍ، فَسَتُصْبِحُ المُدُنُ أَمَاكِنَ نَعِيشُ فِيهَا، لَا أَمَاكِنَ نَهْرُبُ مِنْهَا.</a:t>
@@ -10484,11 +10565,12 @@
               <a:buNone/>
             </a:pPr>
             <a:r>
-              <a:rPr lang="en-US" sz="950" b="1" dirty="0">
+              <a:rPr lang="ar-SA" sz="950" b="1" dirty="0">
                 <a:solidFill>
                   <a:srgbClr val="FFFFFF"/>
                 </a:solidFill>
                 <a:latin typeface="Calibri" pitchFamily="34" charset="0"/>
+                <a:ea typeface="Amiri" pitchFamily="2" charset="-78"/>
                 <a:cs typeface="Amiri" pitchFamily="2" charset="-78"/>
               </a:rPr>
               <a:t>يُتَوَقَّعُ أَنْ</a:t>
@@ -10549,11 +10631,12 @@
               <a:buNone/>
             </a:pPr>
             <a:r>
-              <a:rPr lang="en-US" sz="950" b="1" dirty="0">
+              <a:rPr lang="ar-SA" sz="950" b="1" dirty="0">
                 <a:solidFill>
                   <a:srgbClr val="FFFFFF"/>
                 </a:solidFill>
                 <a:latin typeface="Calibri" pitchFamily="34" charset="0"/>
+                <a:ea typeface="Amiri" pitchFamily="2" charset="-78"/>
                 <a:cs typeface="Amiri" pitchFamily="2" charset="-78"/>
               </a:rPr>
               <a:t>فَتُبْنَى الأَحْيَاءُ</a:t>
@@ -10614,11 +10697,12 @@
               <a:buNone/>
             </a:pPr>
             <a:r>
-              <a:rPr lang="en-US" sz="950" b="1" dirty="0">
+              <a:rPr lang="ar-SA" sz="950" b="1" dirty="0">
                 <a:solidFill>
                   <a:srgbClr val="FFFFFF"/>
                 </a:solidFill>
                 <a:latin typeface="Calibri" pitchFamily="34" charset="0"/>
+                <a:ea typeface="Amiri" pitchFamily="2" charset="-78"/>
                 <a:cs typeface="Amiri" pitchFamily="2" charset="-78"/>
               </a:rPr>
               <a:t>لَيْسَتْ رَفَاهِيَةً، بَلْ</a:t>
@@ -10679,11 +10763,12 @@
               <a:buNone/>
             </a:pPr>
             <a:r>
-              <a:rPr lang="en-US" sz="950" b="1" dirty="0">
+              <a:rPr lang="ar-SA" sz="950" b="1" dirty="0">
                 <a:solidFill>
                   <a:srgbClr val="FFFFFF"/>
                 </a:solidFill>
                 <a:latin typeface="Calibri" pitchFamily="34" charset="0"/>
+                <a:ea typeface="Amiri" pitchFamily="2" charset="-78"/>
                 <a:cs typeface="Amiri" pitchFamily="2" charset="-78"/>
               </a:rPr>
               <a:t>إِذَا اسْتَثْمَرَتْ … فَسَتُصْبِحُ</a:t>
@@ -10817,6 +10902,7 @@
                   <a:srgbClr val="D4AF37"/>
                 </a:solidFill>
                 <a:latin typeface="Amiri" pitchFamily="2" charset="-78"/>
+                <a:ea typeface="Amiri" pitchFamily="2" charset="-78"/>
                 <a:cs typeface="Amiri" pitchFamily="2" charset="-78"/>
               </a:rPr>
               <a:t>م</a:t>
@@ -11137,6 +11223,7 @@
                   <a:srgbClr val="8A6D1E"/>
                 </a:solidFill>
                 <a:latin typeface="Amiri" pitchFamily="2" charset="-78"/>
+                <a:ea typeface="Amiri" pitchFamily="2" charset="-78"/>
                 <a:cs typeface="Amiri" pitchFamily="2" charset="-78"/>
               </a:rPr>
               <a:t>قَيِّمْ عَمَلَكَ</a:t>
@@ -12381,6 +12468,7 @@
                   <a:srgbClr val="FFFFFF"/>
                 </a:solidFill>
                 <a:latin typeface="Amiri" pitchFamily="2" charset="-78"/>
+                <a:ea typeface="Amiri" pitchFamily="2" charset="-78"/>
                 <a:cs typeface="Amiri" pitchFamily="2" charset="-78"/>
               </a:rPr>
               <a:t>أَحْسَنْتُمْ! إِلَى اللِّقَاءِ</a:t>
@@ -12533,6 +12621,7 @@
                   <a:srgbClr val="D4AF37"/>
                 </a:solidFill>
                 <a:latin typeface="Amiri" pitchFamily="2" charset="-78"/>
+                <a:ea typeface="Amiri" pitchFamily="2" charset="-78"/>
                 <a:cs typeface="Amiri" pitchFamily="2" charset="-78"/>
               </a:rPr>
               <a:t>وَرْشَةُ التَّدْرِيبِ</a:t>
@@ -12666,6 +12755,7 @@
                   <a:srgbClr val="D4AF37"/>
                 </a:solidFill>
                 <a:latin typeface="Amiri" pitchFamily="2" charset="-78"/>
+                <a:ea typeface="Amiri" pitchFamily="2" charset="-78"/>
                 <a:cs typeface="Amiri" pitchFamily="2" charset="-78"/>
               </a:rPr>
               <a:t>م</a:t>
@@ -12986,6 +13076,7 @@
                   <a:srgbClr val="8A6D1E"/>
                 </a:solidFill>
                 <a:latin typeface="Amiri" pitchFamily="2" charset="-78"/>
+                <a:ea typeface="Amiri" pitchFamily="2" charset="-78"/>
                 <a:cs typeface="Amiri" pitchFamily="2" charset="-78"/>
               </a:rPr>
               <a:t>آدَابُ الصَّفِّ</a:t>
@@ -14517,6 +14608,7 @@
                   <a:srgbClr val="D4AF37"/>
                 </a:solidFill>
                 <a:latin typeface="Amiri" pitchFamily="2" charset="-78"/>
+                <a:ea typeface="Amiri" pitchFamily="2" charset="-78"/>
                 <a:cs typeface="Amiri" pitchFamily="2" charset="-78"/>
               </a:rPr>
               <a:t>م</a:t>
@@ -14837,6 +14929,7 @@
                   <a:srgbClr val="8A6D1E"/>
                 </a:solidFill>
                 <a:latin typeface="Amiri" pitchFamily="2" charset="-78"/>
+                <a:ea typeface="Amiri" pitchFamily="2" charset="-78"/>
                 <a:cs typeface="Amiri" pitchFamily="2" charset="-78"/>
               </a:rPr>
               <a:t>خَرِيطَةُ الوَرْشَةِ</a:t>
@@ -15151,6 +15244,7 @@
                   <a:srgbClr val="1B3B6F"/>
                 </a:solidFill>
                 <a:latin typeface="Amiri" pitchFamily="2" charset="-78"/>
+                <a:ea typeface="Amiri" pitchFamily="2" charset="-78"/>
                 <a:cs typeface="Amiri" pitchFamily="2" charset="-78"/>
               </a:rPr>
               <a:t>كَيْفَ</a:t>
@@ -15427,6 +15521,7 @@
                   <a:srgbClr val="1E6B52"/>
                 </a:solidFill>
                 <a:latin typeface="Amiri" pitchFamily="2" charset="-78"/>
+                <a:ea typeface="Amiri" pitchFamily="2" charset="-78"/>
                 <a:cs typeface="Amiri" pitchFamily="2" charset="-78"/>
               </a:rPr>
               <a:t>الاسْتِمَارَةُ</a:t>
@@ -15703,6 +15798,7 @@
                   <a:srgbClr val="1E6B52"/>
                 </a:solidFill>
                 <a:latin typeface="Amiri" pitchFamily="2" charset="-78"/>
+                <a:ea typeface="Amiri" pitchFamily="2" charset="-78"/>
                 <a:cs typeface="Amiri" pitchFamily="2" charset="-78"/>
               </a:rPr>
               <a:t>الرِّسَالَةُ</a:t>
@@ -15979,6 +16075,7 @@
                   <a:srgbClr val="1E6B52"/>
                 </a:solidFill>
                 <a:latin typeface="Amiri" pitchFamily="2" charset="-78"/>
+                <a:ea typeface="Amiri" pitchFamily="2" charset="-78"/>
                 <a:cs typeface="Amiri" pitchFamily="2" charset="-78"/>
               </a:rPr>
               <a:t>المَقَالُ</a:t>
@@ -16255,6 +16352,7 @@
                   <a:srgbClr val="8A6D1E"/>
                 </a:solidFill>
                 <a:latin typeface="Amiri" pitchFamily="2" charset="-78"/>
+                <a:ea typeface="Amiri" pitchFamily="2" charset="-78"/>
                 <a:cs typeface="Amiri" pitchFamily="2" charset="-78"/>
               </a:rPr>
               <a:t>قَيِّمْ</a:t>
@@ -16498,6 +16596,7 @@
                   <a:srgbClr val="D4AF37"/>
                 </a:solidFill>
                 <a:latin typeface="Amiri" pitchFamily="2" charset="-78"/>
+                <a:ea typeface="Amiri" pitchFamily="2" charset="-78"/>
                 <a:cs typeface="Amiri" pitchFamily="2" charset="-78"/>
               </a:rPr>
               <a:t>م</a:t>
@@ -16818,6 +16917,7 @@
                   <a:srgbClr val="8A6D1E"/>
                 </a:solidFill>
                 <a:latin typeface="Amiri" pitchFamily="2" charset="-78"/>
+                <a:ea typeface="Amiri" pitchFamily="2" charset="-78"/>
                 <a:cs typeface="Amiri" pitchFamily="2" charset="-78"/>
               </a:rPr>
               <a:t>امْتِحَانُ الكِتَابَةِ</a:t>
@@ -17442,6 +17542,7 @@
                   <a:srgbClr val="1B3B6F"/>
                 </a:solidFill>
                 <a:latin typeface="Amiri" pitchFamily="2" charset="-78"/>
+                <a:ea typeface="Amiri" pitchFamily="2" charset="-78"/>
                 <a:cs typeface="Amiri" pitchFamily="2" charset="-78"/>
               </a:rPr>
               <a:t>بَيْتُنَا يَقَعُ مُقَابِلَ حَدِيقَةٍ وَاسِعَةٍ</a:t>
@@ -17541,6 +17642,7 @@
                   <a:srgbClr val="1B3B6F"/>
                 </a:solidFill>
                 <a:latin typeface="Amiri" pitchFamily="2" charset="-78"/>
+                <a:ea typeface="Amiri" pitchFamily="2" charset="-78"/>
                 <a:cs typeface="Amiri" pitchFamily="2" charset="-78"/>
               </a:rPr>
               <a:t>مَتْحَفٌ مَبْنِيٌّ مِنَ الحَجَرِ الأَبْيَضِ</a:t>
@@ -17640,6 +17742,7 @@
                   <a:srgbClr val="1B3B6F"/>
                 </a:solidFill>
                 <a:latin typeface="Amiri" pitchFamily="2" charset="-78"/>
+                <a:ea typeface="Amiri" pitchFamily="2" charset="-78"/>
                 <a:cs typeface="Amiri" pitchFamily="2" charset="-78"/>
               </a:rPr>
               <a:t>مَدِينَتِي أَهْدَأُ وَأَنْظَفُ مِنَ العَاصِمَةِ</a:t>
@@ -17811,6 +17914,7 @@
                   <a:srgbClr val="D4AF37"/>
                 </a:solidFill>
                 <a:latin typeface="Amiri" pitchFamily="2" charset="-78"/>
+                <a:ea typeface="Amiri" pitchFamily="2" charset="-78"/>
                 <a:cs typeface="Amiri" pitchFamily="2" charset="-78"/>
               </a:rPr>
               <a:t>م</a:t>
@@ -18131,6 +18235,7 @@
                   <a:srgbClr val="8A6D1E"/>
                 </a:solidFill>
                 <a:latin typeface="Amiri" pitchFamily="2" charset="-78"/>
+                <a:ea typeface="Amiri" pitchFamily="2" charset="-78"/>
                 <a:cs typeface="Amiri" pitchFamily="2" charset="-78"/>
               </a:rPr>
               <a:t>اسْتِمَارَةُ تَسْجِيلِ السُّكَّانِ الجُدُدِ</a:t>
@@ -18487,6 +18592,7 @@
                   <a:srgbClr val="1B3B6F"/>
                 </a:solidFill>
                 <a:latin typeface="Amiri" pitchFamily="2" charset="-78"/>
+                <a:ea typeface="Amiri" pitchFamily="2" charset="-78"/>
                 <a:cs typeface="Amiri" pitchFamily="2" charset="-78"/>
               </a:rPr>
               <a:t>الاسْمُ</a:t>
@@ -18731,6 +18837,7 @@
                   <a:srgbClr val="1B3B6F"/>
                 </a:solidFill>
                 <a:latin typeface="Amiri" pitchFamily="2" charset="-78"/>
+                <a:ea typeface="Amiri" pitchFamily="2" charset="-78"/>
                 <a:cs typeface="Amiri" pitchFamily="2" charset="-78"/>
               </a:rPr>
               <a:t>العُنْوَانُ الجَدِيدُ</a:t>
@@ -18975,6 +19082,7 @@
                   <a:srgbClr val="1B3B6F"/>
                 </a:solidFill>
                 <a:latin typeface="Amiri" pitchFamily="2" charset="-78"/>
+                <a:ea typeface="Amiri" pitchFamily="2" charset="-78"/>
                 <a:cs typeface="Amiri" pitchFamily="2" charset="-78"/>
               </a:rPr>
               <a:t>نَوْعُ السَّكَنِ</a:t>
@@ -19219,6 +19327,7 @@
                   <a:srgbClr val="1B3B6F"/>
                 </a:solidFill>
                 <a:latin typeface="Amiri" pitchFamily="2" charset="-78"/>
+                <a:ea typeface="Amiri" pitchFamily="2" charset="-78"/>
                 <a:cs typeface="Amiri" pitchFamily="2" charset="-78"/>
               </a:rPr>
               <a:t>عَدَدُ أَفْرَادِ الأُسْرَةِ</a:t>
@@ -19463,6 +19572,7 @@
                   <a:srgbClr val="1B3B6F"/>
                 </a:solidFill>
                 <a:latin typeface="Amiri" pitchFamily="2" charset="-78"/>
+                <a:ea typeface="Amiri" pitchFamily="2" charset="-78"/>
                 <a:cs typeface="Amiri" pitchFamily="2" charset="-78"/>
               </a:rPr>
               <a:t>أَقْرَبُ مَدْرَسَةٍ</a:t>
@@ -19707,6 +19817,7 @@
                   <a:srgbClr val="1B3B6F"/>
                 </a:solidFill>
                 <a:latin typeface="Amiri" pitchFamily="2" charset="-78"/>
+                <a:ea typeface="Amiri" pitchFamily="2" charset="-78"/>
                 <a:cs typeface="Amiri" pitchFamily="2" charset="-78"/>
               </a:rPr>
               <a:t>وَسِيلَةُ المُوَاصَلَاتِ</a:t>
@@ -19951,6 +20062,7 @@
                   <a:srgbClr val="1B3B6F"/>
                 </a:solidFill>
                 <a:latin typeface="Amiri" pitchFamily="2" charset="-78"/>
+                <a:ea typeface="Amiri" pitchFamily="2" charset="-78"/>
                 <a:cs typeface="Amiri" pitchFamily="2" charset="-78"/>
               </a:rPr>
               <a:t>خِدْمَةٌ تَحْتَاجُ إِلَيْهَا</a:t>
@@ -20130,6 +20242,7 @@
                   <a:srgbClr val="1B3B6F"/>
                 </a:solidFill>
                 <a:latin typeface="Amiri" pitchFamily="2" charset="-78"/>
+                <a:ea typeface="Amiri" pitchFamily="2" charset="-78"/>
                 <a:cs typeface="Amiri" pitchFamily="2" charset="-78"/>
               </a:rPr>
               <a:t>جُمْلَةٌ: صِفْ مَوْقِعَ بَيْتِكَ</a:t>
@@ -20339,6 +20452,7 @@
                   <a:srgbClr val="D4AF37"/>
                 </a:solidFill>
                 <a:latin typeface="Amiri" pitchFamily="2" charset="-78"/>
+                <a:ea typeface="Amiri" pitchFamily="2" charset="-78"/>
                 <a:cs typeface="Amiri" pitchFamily="2" charset="-78"/>
               </a:rPr>
               <a:t>م</a:t>
@@ -20659,6 +20773,7 @@
                   <a:srgbClr val="8A6D1E"/>
                 </a:solidFill>
                 <a:latin typeface="Amiri" pitchFamily="2" charset="-78"/>
+                <a:ea typeface="Amiri" pitchFamily="2" charset="-78"/>
                 <a:cs typeface="Amiri" pitchFamily="2" charset="-78"/>
               </a:rPr>
               <a:t>نَمُوذَجُ الإِجَابَةِ</a:t>
@@ -20977,6 +21092,7 @@
                   <a:srgbClr val="1B3B6F"/>
                 </a:solidFill>
                 <a:latin typeface="Amiri" pitchFamily="2" charset="-78"/>
+                <a:ea typeface="Amiri" pitchFamily="2" charset="-78"/>
                 <a:cs typeface="Amiri" pitchFamily="2" charset="-78"/>
               </a:rPr>
               <a:t>نُورُ حُسَيْنٌ</a:t>
@@ -21015,6 +21131,7 @@
                   <a:srgbClr val="1B3B6F"/>
                 </a:solidFill>
                 <a:latin typeface="Amiri" pitchFamily="2" charset="-78"/>
+                <a:ea typeface="Amiri" pitchFamily="2" charset="-78"/>
                 <a:cs typeface="Amiri" pitchFamily="2" charset="-78"/>
               </a:rPr>
               <a:t>الاسْمُ</a:t>
@@ -21156,6 +21273,7 @@
                   <a:srgbClr val="1B3B6F"/>
                 </a:solidFill>
                 <a:latin typeface="Amiri" pitchFamily="2" charset="-78"/>
+                <a:ea typeface="Amiri" pitchFamily="2" charset="-78"/>
                 <a:cs typeface="Amiri" pitchFamily="2" charset="-78"/>
               </a:rPr>
               <a:t>١٢ شَارِعُ الحَدِيقَةِ</a:t>
@@ -21194,6 +21312,7 @@
                   <a:srgbClr val="1B3B6F"/>
                 </a:solidFill>
                 <a:latin typeface="Amiri" pitchFamily="2" charset="-78"/>
+                <a:ea typeface="Amiri" pitchFamily="2" charset="-78"/>
                 <a:cs typeface="Amiri" pitchFamily="2" charset="-78"/>
               </a:rPr>
               <a:t>العُنْوَانُ الجَدِيدُ</a:t>
@@ -21335,6 +21454,7 @@
                   <a:srgbClr val="1B3B6F"/>
                 </a:solidFill>
                 <a:latin typeface="Amiri" pitchFamily="2" charset="-78"/>
+                <a:ea typeface="Amiri" pitchFamily="2" charset="-78"/>
                 <a:cs typeface="Amiri" pitchFamily="2" charset="-78"/>
               </a:rPr>
               <a:t>شَقَّةٌ فِي الطَّابِقِ الثَّالِثِ</a:t>
@@ -21373,6 +21493,7 @@
                   <a:srgbClr val="1B3B6F"/>
                 </a:solidFill>
                 <a:latin typeface="Amiri" pitchFamily="2" charset="-78"/>
+                <a:ea typeface="Amiri" pitchFamily="2" charset="-78"/>
                 <a:cs typeface="Amiri" pitchFamily="2" charset="-78"/>
               </a:rPr>
               <a:t>نَوْعُ السَّكَنِ</a:t>
@@ -21514,6 +21635,7 @@
                   <a:srgbClr val="1B3B6F"/>
                 </a:solidFill>
                 <a:latin typeface="Amiri" pitchFamily="2" charset="-78"/>
+                <a:ea typeface="Amiri" pitchFamily="2" charset="-78"/>
                 <a:cs typeface="Amiri" pitchFamily="2" charset="-78"/>
               </a:rPr>
               <a:t>خَمْسَةٌ</a:t>
@@ -21552,6 +21674,7 @@
                   <a:srgbClr val="1B3B6F"/>
                 </a:solidFill>
                 <a:latin typeface="Amiri" pitchFamily="2" charset="-78"/>
+                <a:ea typeface="Amiri" pitchFamily="2" charset="-78"/>
                 <a:cs typeface="Amiri" pitchFamily="2" charset="-78"/>
               </a:rPr>
               <a:t>عَدَدُ أَفْرَادِ الأُسْرَةِ</a:t>
@@ -21693,6 +21816,7 @@
                   <a:srgbClr val="1B3B6F"/>
                 </a:solidFill>
                 <a:latin typeface="Amiri" pitchFamily="2" charset="-78"/>
+                <a:ea typeface="Amiri" pitchFamily="2" charset="-78"/>
                 <a:cs typeface="Amiri" pitchFamily="2" charset="-78"/>
               </a:rPr>
               <a:t>مَدْرَسَةُ النُّورِ</a:t>
@@ -21731,6 +21855,7 @@
                   <a:srgbClr val="1B3B6F"/>
                 </a:solidFill>
                 <a:latin typeface="Amiri" pitchFamily="2" charset="-78"/>
+                <a:ea typeface="Amiri" pitchFamily="2" charset="-78"/>
                 <a:cs typeface="Amiri" pitchFamily="2" charset="-78"/>
               </a:rPr>
               <a:t>أَقْرَبُ مَدْرَسَةٍ</a:t>
@@ -21872,6 +21997,7 @@
                   <a:srgbClr val="1B3B6F"/>
                 </a:solidFill>
                 <a:latin typeface="Amiri" pitchFamily="2" charset="-78"/>
+                <a:ea typeface="Amiri" pitchFamily="2" charset="-78"/>
                 <a:cs typeface="Amiri" pitchFamily="2" charset="-78"/>
               </a:rPr>
               <a:t>الحَافِلَةُ وَالقِطَارُ</a:t>
@@ -21910,6 +22036,7 @@
                   <a:srgbClr val="1B3B6F"/>
                 </a:solidFill>
                 <a:latin typeface="Amiri" pitchFamily="2" charset="-78"/>
+                <a:ea typeface="Amiri" pitchFamily="2" charset="-78"/>
                 <a:cs typeface="Amiri" pitchFamily="2" charset="-78"/>
               </a:rPr>
               <a:t>وَسِيلَةُ المُوَاصَلَاتِ</a:t>
@@ -22051,6 +22178,7 @@
                   <a:srgbClr val="1B3B6F"/>
                 </a:solidFill>
                 <a:latin typeface="Amiri" pitchFamily="2" charset="-78"/>
+                <a:ea typeface="Amiri" pitchFamily="2" charset="-78"/>
                 <a:cs typeface="Amiri" pitchFamily="2" charset="-78"/>
               </a:rPr>
               <a:t>مَكْتَبَةٌ عَامَّةٌ قَرِيبَةٌ</a:t>
@@ -22089,6 +22217,7 @@
                   <a:srgbClr val="1B3B6F"/>
                 </a:solidFill>
                 <a:latin typeface="Amiri" pitchFamily="2" charset="-78"/>
+                <a:ea typeface="Amiri" pitchFamily="2" charset="-78"/>
                 <a:cs typeface="Amiri" pitchFamily="2" charset="-78"/>
               </a:rPr>
               <a:t>خِدْمَةٌ تَحْتَاجُ إِلَيْهَا</a:t>
@@ -22230,6 +22359,7 @@
                   <a:srgbClr val="1B3B6F"/>
                 </a:solidFill>
                 <a:latin typeface="Amiri" pitchFamily="2" charset="-78"/>
+                <a:ea typeface="Amiri" pitchFamily="2" charset="-78"/>
                 <a:cs typeface="Amiri" pitchFamily="2" charset="-78"/>
               </a:rPr>
               <a:t>بَيْتِي مُقَابِلَ الحَدِيقَةِ، بَيْنَ المَسْجِدِ وَالمَخْبَزِ.</a:t>
@@ -22268,6 +22398,7 @@
                   <a:srgbClr val="1B3B6F"/>
                 </a:solidFill>
                 <a:latin typeface="Amiri" pitchFamily="2" charset="-78"/>
+                <a:ea typeface="Amiri" pitchFamily="2" charset="-78"/>
                 <a:cs typeface="Amiri" pitchFamily="2" charset="-78"/>
               </a:rPr>
               <a:t>جُمْلَةٌ: صِفْ مَوْقِعَ بَيْتِكَ</a:t>
@@ -22477,6 +22608,7 @@
                   <a:srgbClr val="D4AF37"/>
                 </a:solidFill>
                 <a:latin typeface="Amiri" pitchFamily="2" charset="-78"/>
+                <a:ea typeface="Amiri" pitchFamily="2" charset="-78"/>
                 <a:cs typeface="Amiri" pitchFamily="2" charset="-78"/>
               </a:rPr>
               <a:t>م</a:t>
@@ -22797,6 +22929,7 @@
                   <a:srgbClr val="8A6D1E"/>
                 </a:solidFill>
                 <a:latin typeface="Amiri" pitchFamily="2" charset="-78"/>
+                <a:ea typeface="Amiri" pitchFamily="2" charset="-78"/>
                 <a:cs typeface="Amiri" pitchFamily="2" charset="-78"/>
               </a:rPr>
               <a:t>أَهْلًا بِكِ فِي مَدِينَتِي</a:t>
@@ -23272,6 +23405,7 @@
                   <a:srgbClr val="1B3B6F"/>
                 </a:solidFill>
                 <a:latin typeface="Amiri" pitchFamily="2" charset="-78"/>
+                <a:ea typeface="Amiri" pitchFamily="2" charset="-78"/>
                 <a:cs typeface="Amiri" pitchFamily="2" charset="-78"/>
               </a:rPr>
               <a:t>أَسْكُنُ فِي … بَيْتِي مُقَابِلَ …</a:t>
@@ -23348,6 +23482,7 @@
                   <a:srgbClr val="1B3B6F"/>
                 </a:solidFill>
                 <a:latin typeface="Amiri" pitchFamily="2" charset="-78"/>
+                <a:ea typeface="Amiri" pitchFamily="2" charset="-78"/>
                 <a:cs typeface="Amiri" pitchFamily="2" charset="-78"/>
               </a:rPr>
               <a:t>فِي مَدِينَتِي يُوجَدُ … وَتُوجَدُ …</a:t>
@@ -23424,6 +23559,7 @@
                   <a:srgbClr val="1B3B6F"/>
                 </a:solidFill>
                 <a:latin typeface="Amiri" pitchFamily="2" charset="-78"/>
+                <a:ea typeface="Amiri" pitchFamily="2" charset="-78"/>
                 <a:cs typeface="Amiri" pitchFamily="2" charset="-78"/>
               </a:rPr>
               <a:t>فِي الأُسْبُوعِ المَاضِي فُتِحَ …</a:t>
@@ -23500,6 +23636,7 @@
                   <a:srgbClr val="1B3B6F"/>
                 </a:solidFill>
                 <a:latin typeface="Amiri" pitchFamily="2" charset="-78"/>
+                <a:ea typeface="Amiri" pitchFamily="2" charset="-78"/>
                 <a:cs typeface="Amiri" pitchFamily="2" charset="-78"/>
               </a:rPr>
               <a:t>عِنْدَمَا تَأْتِينَ، سَنَزُورُ …</a:t>
@@ -23671,6 +23808,7 @@
                   <a:srgbClr val="D4AF37"/>
                 </a:solidFill>
                 <a:latin typeface="Amiri" pitchFamily="2" charset="-78"/>
+                <a:ea typeface="Amiri" pitchFamily="2" charset="-78"/>
                 <a:cs typeface="Amiri" pitchFamily="2" charset="-78"/>
               </a:rPr>
               <a:t>م</a:t>
@@ -23991,6 +24129,7 @@
                   <a:srgbClr val="8A6D1E"/>
                 </a:solidFill>
                 <a:latin typeface="Amiri" pitchFamily="2" charset="-78"/>
+                <a:ea typeface="Amiri" pitchFamily="2" charset="-78"/>
                 <a:cs typeface="Amiri" pitchFamily="2" charset="-78"/>
               </a:rPr>
               <a:t>نَصُّ السُّؤَالِ</a:t>
@@ -24271,6 +24410,7 @@
                   <a:srgbClr val="1B3B6F"/>
                 </a:solidFill>
                 <a:latin typeface="Amiri" pitchFamily="2" charset="-78"/>
+                <a:ea typeface="Amiri" pitchFamily="2" charset="-78"/>
                 <a:cs typeface="Amiri" pitchFamily="2" charset="-78"/>
               </a:rPr>
               <a:t>سَتَزُورُكِ صَدِيقَتُكِ فِي مَدِينَتِكِ. اكْتُبِي لَهَا رِسَالَةً (٨٠–٩٠ كَلِمَةً).</a:t>
@@ -24412,6 +24552,7 @@
                   <a:srgbClr val="1B3B6F"/>
                 </a:solidFill>
                 <a:latin typeface="Amiri" pitchFamily="2" charset="-78"/>
+                <a:ea typeface="Amiri" pitchFamily="2" charset="-78"/>
                 <a:cs typeface="Amiri" pitchFamily="2" charset="-78"/>
               </a:rPr>
               <a:t>أَيْنَ تَسْكُنِينَ؟ وَمَاذَا يُوجَدُ قُرْبَ بَيْتِكِ؟</a:t>
@@ -24553,6 +24694,7 @@
                   <a:srgbClr val="1B3B6F"/>
                 </a:solidFill>
                 <a:latin typeface="Amiri" pitchFamily="2" charset="-78"/>
+                <a:ea typeface="Amiri" pitchFamily="2" charset="-78"/>
                 <a:cs typeface="Amiri" pitchFamily="2" charset="-78"/>
               </a:rPr>
               <a:t>مَاذَا يُوجَدُ فِي مَدِينَتِكِ؟</a:t>
@@ -24694,6 +24836,7 @@
                   <a:srgbClr val="1B3B6F"/>
                 </a:solidFill>
                 <a:latin typeface="Amiri" pitchFamily="2" charset="-78"/>
+                <a:ea typeface="Amiri" pitchFamily="2" charset="-78"/>
                 <a:cs typeface="Amiri" pitchFamily="2" charset="-78"/>
               </a:rPr>
               <a:t>مَا الجَدِيدُ الَّذِي افْتُتِحَ أَوْ بُنِيَ مُؤَخَّرًا؟</a:t>
@@ -24835,6 +24978,7 @@
                   <a:srgbClr val="1B3B6F"/>
                 </a:solidFill>
                 <a:latin typeface="Amiri" pitchFamily="2" charset="-78"/>
+                <a:ea typeface="Amiri" pitchFamily="2" charset="-78"/>
                 <a:cs typeface="Amiri" pitchFamily="2" charset="-78"/>
               </a:rPr>
               <a:t>مَا رَأْيُكِ فِي المَدِينَةِ؟ وَمَاذَا سَتَفْعَلَانِ مَعًا؟</a:t>
@@ -25044,6 +25188,7 @@
                   <a:srgbClr val="D4AF37"/>
                 </a:solidFill>
                 <a:latin typeface="Amiri" pitchFamily="2" charset="-78"/>
+                <a:ea typeface="Amiri" pitchFamily="2" charset="-78"/>
                 <a:cs typeface="Amiri" pitchFamily="2" charset="-78"/>
               </a:rPr>
               <a:t>م</a:t>
@@ -25364,6 +25509,7 @@
                   <a:srgbClr val="8A6D1E"/>
                 </a:solidFill>
                 <a:latin typeface="Amiri" pitchFamily="2" charset="-78"/>
+                <a:ea typeface="Amiri" pitchFamily="2" charset="-78"/>
                 <a:cs typeface="Amiri" pitchFamily="2" charset="-78"/>
               </a:rPr>
               <a:t>قَوَالِبُ الكِتَابَةِ</a:t>
@@ -25644,6 +25790,7 @@
                   <a:srgbClr val="1B3B6F"/>
                 </a:solidFill>
                 <a:latin typeface="Amiri" pitchFamily="2" charset="-78"/>
+                <a:ea typeface="Amiri" pitchFamily="2" charset="-78"/>
                 <a:cs typeface="Amiri" pitchFamily="2" charset="-78"/>
               </a:rPr>
               <a:t>مَرْحَبًا يَا ______ ، كَيْفَ حَالُكِ؟</a:t>
@@ -25850,6 +25997,7 @@
                   <a:srgbClr val="1B3B6F"/>
                 </a:solidFill>
                 <a:latin typeface="Amiri" pitchFamily="2" charset="-78"/>
+                <a:ea typeface="Amiri" pitchFamily="2" charset="-78"/>
                 <a:cs typeface="Amiri" pitchFamily="2" charset="-78"/>
               </a:rPr>
               <a:t>أَسْكُنُ فِي حَيٍّ ______ . بَيْتِي مُقَابِلَ ______ ، وَبِجَانِبِهِ ______ .</a:t>
@@ -26056,6 +26204,7 @@
                   <a:srgbClr val="1B3B6F"/>
                 </a:solidFill>
                 <a:latin typeface="Amiri" pitchFamily="2" charset="-78"/>
+                <a:ea typeface="Amiri" pitchFamily="2" charset="-78"/>
                 <a:cs typeface="Amiri" pitchFamily="2" charset="-78"/>
               </a:rPr>
               <a:t>فِي مَدِينَتِي يُوجَدُ ______ ، وَتُوجَدُ ______ .</a:t>
@@ -26262,6 +26411,7 @@
                   <a:srgbClr val="1B3B6F"/>
                 </a:solidFill>
                 <a:latin typeface="Amiri" pitchFamily="2" charset="-78"/>
+                <a:ea typeface="Amiri" pitchFamily="2" charset="-78"/>
                 <a:cs typeface="Amiri" pitchFamily="2" charset="-78"/>
               </a:rPr>
               <a:t>فِي الأُسْبُوعِ المَاضِي فُتِحَ ______ .</a:t>
@@ -26468,6 +26618,7 @@
                   <a:srgbClr val="1B3B6F"/>
                 </a:solidFill>
                 <a:latin typeface="Amiri" pitchFamily="2" charset="-78"/>
+                <a:ea typeface="Amiri" pitchFamily="2" charset="-78"/>
                 <a:cs typeface="Amiri" pitchFamily="2" charset="-78"/>
               </a:rPr>
               <a:t>مَدِينَتِي أَ______ مِنْ ______ . عِنْدَمَا تَأْتِينَ، سَنَزُورُ ______ .</a:t>
@@ -26674,6 +26825,7 @@
                   <a:srgbClr val="1B3B6F"/>
                 </a:solidFill>
                 <a:latin typeface="Amiri" pitchFamily="2" charset="-78"/>
+                <a:ea typeface="Amiri" pitchFamily="2" charset="-78"/>
                 <a:cs typeface="Amiri" pitchFamily="2" charset="-78"/>
               </a:rPr>
               <a:t>إِلَى اللِّقَاءِ، ______</a:t>
@@ -26913,13 +27065,9 @@
     <a:fontScheme name="Office">
       <a:majorFont>
         <a:latin typeface="Calibri Light" panose="020F0302020204030204"/>
-        <a:ea typeface=""/>
-        <a:cs typeface=""/>
-        <a:font script="Jpan" typeface="游ゴシック Light"/>
-        <a:font script="Hang" typeface="맑은 고딕"/>
-        <a:font script="Hans" typeface="等线 Light"/>
-        <a:font script="Hant" typeface="新細明體"/>
-        <a:font script="Arab" typeface="Times New Roman"/>
+        <a:ea typeface="Amiri" pitchFamily="2" charset="-78"/>
+        <a:cs typeface="Amiri" pitchFamily="2" charset="-78"/>
+        <a:font script="Arab" typeface="Amiri"/>
         <a:font script="Hebr" typeface="Times New Roman"/>
         <a:font script="Thai" typeface="Angsana New"/>
         <a:font script="Ethi" typeface="Nyala"/>
@@ -26965,13 +27113,9 @@
       </a:majorFont>
       <a:minorFont>
         <a:latin typeface="Calibri" panose="020F0502020204030204"/>
-        <a:ea typeface=""/>
-        <a:cs typeface=""/>
-        <a:font script="Jpan" typeface="游ゴシック"/>
-        <a:font script="Hang" typeface="맑은 고딕"/>
-        <a:font script="Hans" typeface="等线"/>
-        <a:font script="Hant" typeface="新細明體"/>
-        <a:font script="Arab" typeface="Arial"/>
+        <a:ea typeface="Amiri" pitchFamily="2" charset="-78"/>
+        <a:cs typeface="Amiri" pitchFamily="2" charset="-78"/>
+        <a:font script="Arab" typeface="Amiri"/>
         <a:font script="Hebr" typeface="Arial"/>
         <a:font script="Thai" typeface="Cordia New"/>
         <a:font script="Ethi" typeface="Nyala"/>

--- a/Topic_C/Exam_Practice/TC-L08_Writing_Workshop_Buildings_Services_Urban_Areas.pptx
+++ b/Topic_C/Exam_Practice/TC-L08_Writing_Workshop_Buildings_Services_Urban_Areas.pptx
@@ -3848,7 +3848,7 @@
                 <a:solidFill>
                   <a:srgbClr val="FFFFFF"/>
                 </a:solidFill>
-                <a:latin typeface="Calibri" pitchFamily="34" charset="0"/>
+                <a:latin typeface="Amiri" pitchFamily="2" charset="-78"/>
                 <a:ea typeface="Amiri" pitchFamily="2" charset="-78"/>
                 <a:cs typeface="Amiri" pitchFamily="2" charset="-78"/>
               </a:rPr>
@@ -3914,7 +3914,7 @@
                 <a:solidFill>
                   <a:srgbClr val="FFFFFF"/>
                 </a:solidFill>
-                <a:latin typeface="Calibri" pitchFamily="34" charset="0"/>
+                <a:latin typeface="Amiri" pitchFamily="2" charset="-78"/>
                 <a:ea typeface="Amiri" pitchFamily="2" charset="-78"/>
                 <a:cs typeface="Amiri" pitchFamily="2" charset="-78"/>
               </a:rPr>
@@ -3980,7 +3980,7 @@
                 <a:solidFill>
                   <a:srgbClr val="FFFFFF"/>
                 </a:solidFill>
-                <a:latin typeface="Calibri" pitchFamily="34" charset="0"/>
+                <a:latin typeface="Amiri" pitchFamily="2" charset="-78"/>
                 <a:ea typeface="Amiri" pitchFamily="2" charset="-78"/>
                 <a:cs typeface="Amiri" pitchFamily="2" charset="-78"/>
               </a:rPr>
@@ -4046,7 +4046,7 @@
                 <a:solidFill>
                   <a:srgbClr val="FFFFFF"/>
                 </a:solidFill>
-                <a:latin typeface="Calibri" pitchFamily="34" charset="0"/>
+                <a:latin typeface="Amiri" pitchFamily="2" charset="-78"/>
                 <a:ea typeface="Amiri" pitchFamily="2" charset="-78"/>
                 <a:cs typeface="Amiri" pitchFamily="2" charset="-78"/>
               </a:rPr>
@@ -4844,7 +4844,7 @@
                 <a:solidFill>
                   <a:srgbClr val="FFFFFF"/>
                 </a:solidFill>
-                <a:latin typeface="Calibri" pitchFamily="34" charset="0"/>
+                <a:latin typeface="Amiri" pitchFamily="2" charset="-78"/>
                 <a:ea typeface="Amiri" pitchFamily="2" charset="-78"/>
                 <a:cs typeface="Amiri" pitchFamily="2" charset="-78"/>
               </a:rPr>
@@ -4910,7 +4910,7 @@
                 <a:solidFill>
                   <a:srgbClr val="FFFFFF"/>
                 </a:solidFill>
-                <a:latin typeface="Calibri" pitchFamily="34" charset="0"/>
+                <a:latin typeface="Amiri" pitchFamily="2" charset="-78"/>
                 <a:ea typeface="Amiri" pitchFamily="2" charset="-78"/>
                 <a:cs typeface="Amiri" pitchFamily="2" charset="-78"/>
               </a:rPr>
@@ -4976,7 +4976,7 @@
                 <a:solidFill>
                   <a:srgbClr val="FFFFFF"/>
                 </a:solidFill>
-                <a:latin typeface="Calibri" pitchFamily="34" charset="0"/>
+                <a:latin typeface="Amiri" pitchFamily="2" charset="-78"/>
                 <a:ea typeface="Amiri" pitchFamily="2" charset="-78"/>
                 <a:cs typeface="Amiri" pitchFamily="2" charset="-78"/>
               </a:rPr>
@@ -5042,7 +5042,7 @@
                 <a:solidFill>
                   <a:srgbClr val="FFFFFF"/>
                 </a:solidFill>
-                <a:latin typeface="Calibri" pitchFamily="34" charset="0"/>
+                <a:latin typeface="Amiri" pitchFamily="2" charset="-78"/>
                 <a:ea typeface="Amiri" pitchFamily="2" charset="-78"/>
                 <a:cs typeface="Amiri" pitchFamily="2" charset="-78"/>
               </a:rPr>
@@ -8599,7 +8599,7 @@
                 <a:solidFill>
                   <a:srgbClr val="FFFFFF"/>
                 </a:solidFill>
-                <a:latin typeface="Calibri" pitchFamily="34" charset="0"/>
+                <a:latin typeface="Amiri" pitchFamily="2" charset="-78"/>
                 <a:ea typeface="Amiri" pitchFamily="2" charset="-78"/>
                 <a:cs typeface="Amiri" pitchFamily="2" charset="-78"/>
               </a:rPr>
@@ -8665,7 +8665,7 @@
                 <a:solidFill>
                   <a:srgbClr val="FFFFFF"/>
                 </a:solidFill>
-                <a:latin typeface="Calibri" pitchFamily="34" charset="0"/>
+                <a:latin typeface="Amiri" pitchFamily="2" charset="-78"/>
                 <a:ea typeface="Amiri" pitchFamily="2" charset="-78"/>
                 <a:cs typeface="Amiri" pitchFamily="2" charset="-78"/>
               </a:rPr>
@@ -8731,7 +8731,7 @@
                 <a:solidFill>
                   <a:srgbClr val="FFFFFF"/>
                 </a:solidFill>
-                <a:latin typeface="Calibri" pitchFamily="34" charset="0"/>
+                <a:latin typeface="Amiri" pitchFamily="2" charset="-78"/>
                 <a:ea typeface="Amiri" pitchFamily="2" charset="-78"/>
                 <a:cs typeface="Amiri" pitchFamily="2" charset="-78"/>
               </a:rPr>
@@ -8797,7 +8797,7 @@
                 <a:solidFill>
                   <a:srgbClr val="FFFFFF"/>
                 </a:solidFill>
-                <a:latin typeface="Calibri" pitchFamily="34" charset="0"/>
+                <a:latin typeface="Amiri" pitchFamily="2" charset="-78"/>
                 <a:ea typeface="Amiri" pitchFamily="2" charset="-78"/>
                 <a:cs typeface="Amiri" pitchFamily="2" charset="-78"/>
               </a:rPr>
@@ -9584,7 +9584,7 @@
                 <a:solidFill>
                   <a:srgbClr val="FFFFFF"/>
                 </a:solidFill>
-                <a:latin typeface="Calibri" pitchFamily="34" charset="0"/>
+                <a:latin typeface="Amiri" pitchFamily="2" charset="-78"/>
                 <a:ea typeface="Amiri" pitchFamily="2" charset="-78"/>
                 <a:cs typeface="Amiri" pitchFamily="2" charset="-78"/>
               </a:rPr>
@@ -9650,7 +9650,7 @@
                 <a:solidFill>
                   <a:srgbClr val="FFFFFF"/>
                 </a:solidFill>
-                <a:latin typeface="Calibri" pitchFamily="34" charset="0"/>
+                <a:latin typeface="Amiri" pitchFamily="2" charset="-78"/>
                 <a:ea typeface="Amiri" pitchFamily="2" charset="-78"/>
                 <a:cs typeface="Amiri" pitchFamily="2" charset="-78"/>
               </a:rPr>
@@ -9716,7 +9716,7 @@
                 <a:solidFill>
                   <a:srgbClr val="FFFFFF"/>
                 </a:solidFill>
-                <a:latin typeface="Calibri" pitchFamily="34" charset="0"/>
+                <a:latin typeface="Amiri" pitchFamily="2" charset="-78"/>
                 <a:ea typeface="Amiri" pitchFamily="2" charset="-78"/>
                 <a:cs typeface="Amiri" pitchFamily="2" charset="-78"/>
               </a:rPr>
@@ -9782,7 +9782,7 @@
                 <a:solidFill>
                   <a:srgbClr val="FFFFFF"/>
                 </a:solidFill>
-                <a:latin typeface="Calibri" pitchFamily="34" charset="0"/>
+                <a:latin typeface="Amiri" pitchFamily="2" charset="-78"/>
                 <a:ea typeface="Amiri" pitchFamily="2" charset="-78"/>
                 <a:cs typeface="Amiri" pitchFamily="2" charset="-78"/>
               </a:rPr>
@@ -10569,7 +10569,7 @@
                 <a:solidFill>
                   <a:srgbClr val="FFFFFF"/>
                 </a:solidFill>
-                <a:latin typeface="Calibri" pitchFamily="34" charset="0"/>
+                <a:latin typeface="Amiri" pitchFamily="2" charset="-78"/>
                 <a:ea typeface="Amiri" pitchFamily="2" charset="-78"/>
                 <a:cs typeface="Amiri" pitchFamily="2" charset="-78"/>
               </a:rPr>
@@ -10635,7 +10635,7 @@
                 <a:solidFill>
                   <a:srgbClr val="FFFFFF"/>
                 </a:solidFill>
-                <a:latin typeface="Calibri" pitchFamily="34" charset="0"/>
+                <a:latin typeface="Amiri" pitchFamily="2" charset="-78"/>
                 <a:ea typeface="Amiri" pitchFamily="2" charset="-78"/>
                 <a:cs typeface="Amiri" pitchFamily="2" charset="-78"/>
               </a:rPr>
@@ -10701,7 +10701,7 @@
                 <a:solidFill>
                   <a:srgbClr val="FFFFFF"/>
                 </a:solidFill>
-                <a:latin typeface="Calibri" pitchFamily="34" charset="0"/>
+                <a:latin typeface="Amiri" pitchFamily="2" charset="-78"/>
                 <a:ea typeface="Amiri" pitchFamily="2" charset="-78"/>
                 <a:cs typeface="Amiri" pitchFamily="2" charset="-78"/>
               </a:rPr>
@@ -10767,7 +10767,7 @@
                 <a:solidFill>
                   <a:srgbClr val="FFFFFF"/>
                 </a:solidFill>
-                <a:latin typeface="Calibri" pitchFamily="34" charset="0"/>
+                <a:latin typeface="Amiri" pitchFamily="2" charset="-78"/>
                 <a:ea typeface="Amiri" pitchFamily="2" charset="-78"/>
                 <a:cs typeface="Amiri" pitchFamily="2" charset="-78"/>
               </a:rPr>
